--- a/index/designs/y7-l12/l4-radicals-pinyin/l4-radicals-pinyin.pptx
+++ b/index/designs/y7-l12/l4-radicals-pinyin/l4-radicals-pinyin.pptx
@@ -2079,15 +2079,6 @@
               </a:rPr>
               <a:t>部首</a:t>
             </a:r>
-            <a:pPr algn="ctr" indent="0" marL="0">
-              <a:lnSpc>
-                <a:spcPts val="7700"/>
-              </a:lnSpc>
-              <a:spcAft>
-                <a:spcPts val="800"/>
-              </a:spcAft>
-              <a:buNone/>
-            </a:pPr>
             <a:r>
               <a:rPr lang="en-US" sz="7000" b="1" dirty="0">
                 <a:solidFill>
@@ -2099,15 +2090,6 @@
               </a:rPr>
               <a:t>·</a:t>
             </a:r>
-            <a:pPr algn="ctr" indent="0" marL="0">
-              <a:lnSpc>
-                <a:spcPts val="7700"/>
-              </a:lnSpc>
-              <a:spcAft>
-                <a:spcPts val="800"/>
-              </a:spcAft>
-              <a:buNone/>
-            </a:pPr>
             <a:r>
               <a:rPr lang="en-US" sz="7000" b="1" dirty="0">
                 <a:solidFill>
@@ -5115,9 +5097,6 @@
               </a:rPr>
               <a:t>Write the radical in </a:t>
             </a:r>
-            <a:pPr algn="l" indent="0" marL="0">
-              <a:buNone/>
-            </a:pPr>
             <a:r>
               <a:rPr lang="en-US" sz="1300" b="1" dirty="0">
                 <a:solidFill>
@@ -5129,9 +5108,6 @@
               </a:rPr>
               <a:t>铁</a:t>
             </a:r>
-            <a:pPr algn="l" indent="0" marL="0">
-              <a:buNone/>
-            </a:pPr>
             <a:r>
               <a:rPr lang="en-US" sz="1300" dirty="0">
                 <a:solidFill>
@@ -5690,15 +5666,6 @@
               </a:rPr>
               <a:t>Today: </a:t>
             </a:r>
-            <a:pPr algn="ctr" indent="0" marL="0">
-              <a:lnSpc>
-                <a:spcPts val="1760"/>
-              </a:lnSpc>
-              <a:spcBef>
-                <a:spcPts val="1600"/>
-              </a:spcBef>
-              <a:buNone/>
-            </a:pPr>
             <a:r>
               <a:rPr lang="en-US" sz="1100" b="1" dirty="0">
                 <a:solidFill>
@@ -5710,15 +5677,6 @@
               </a:rPr>
               <a:t>部首 (bùshǒu)</a:t>
             </a:r>
-            <a:pPr algn="ctr" indent="0" marL="0">
-              <a:lnSpc>
-                <a:spcPts val="1760"/>
-              </a:lnSpc>
-              <a:spcBef>
-                <a:spcPts val="1600"/>
-              </a:spcBef>
-              <a:buNone/>
-            </a:pPr>
             <a:r>
               <a:rPr lang="en-US" sz="1100" dirty="0">
                 <a:solidFill>
@@ -5730,15 +5688,6 @@
               </a:rPr>
               <a:t> = radicals · </a:t>
             </a:r>
-            <a:pPr algn="ctr" indent="0" marL="0">
-              <a:lnSpc>
-                <a:spcPts val="1760"/>
-              </a:lnSpc>
-              <a:spcBef>
-                <a:spcPts val="1600"/>
-              </a:spcBef>
-              <a:buNone/>
-            </a:pPr>
             <a:r>
               <a:rPr lang="en-US" sz="1100" b="1" dirty="0">
                 <a:solidFill>
@@ -5750,15 +5699,6 @@
               </a:rPr>
               <a:t>ang/eng/ing/ong</a:t>
             </a:r>
-            <a:pPr algn="ctr" indent="0" marL="0">
-              <a:lnSpc>
-                <a:spcPts val="1760"/>
-              </a:lnSpc>
-              <a:spcBef>
-                <a:spcPts val="1600"/>
-              </a:spcBef>
-              <a:buNone/>
-            </a:pPr>
             <a:r>
               <a:rPr lang="en-US" sz="1100" dirty="0">
                 <a:solidFill>
@@ -8925,12 +8865,6 @@
               </a:rPr>
               <a:t>We are learning the </a:t>
             </a:r>
-            <a:pPr algn="l" indent="0" marL="0">
-              <a:lnSpc>
-                <a:spcPts val="2100"/>
-              </a:lnSpc>
-              <a:buNone/>
-            </a:pPr>
             <a:r>
               <a:rPr lang="en-US" sz="1500" b="1" dirty="0">
                 <a:solidFill>
@@ -8942,12 +8876,6 @@
               </a:rPr>
               <a:t>6 new radicals</a:t>
             </a:r>
-            <a:pPr algn="l" indent="0" marL="0">
-              <a:lnSpc>
-                <a:spcPts val="2100"/>
-              </a:lnSpc>
-              <a:buNone/>
-            </a:pPr>
             <a:r>
               <a:rPr lang="en-US" sz="1500" dirty="0">
                 <a:solidFill>
@@ -8959,12 +8887,6 @@
               </a:rPr>
               <a:t> for Lesson 12 and practising the pinyin finals </a:t>
             </a:r>
-            <a:pPr algn="l" indent="0" marL="0">
-              <a:lnSpc>
-                <a:spcPts val="2100"/>
-              </a:lnSpc>
-              <a:buNone/>
-            </a:pPr>
             <a:r>
               <a:rPr lang="en-US" sz="1500" b="1" dirty="0">
                 <a:solidFill>
@@ -8976,12 +8898,6 @@
               </a:rPr>
               <a:t>ang / eng / ing / ong</a:t>
             </a:r>
-            <a:pPr algn="l" indent="0" marL="0">
-              <a:lnSpc>
-                <a:spcPts val="2100"/>
-              </a:lnSpc>
-              <a:buNone/>
-            </a:pPr>
             <a:r>
               <a:rPr lang="en-US" sz="1500" dirty="0">
                 <a:solidFill>
@@ -9105,9 +9021,6 @@
               </a:rPr>
               <a:t>I can name the </a:t>
             </a:r>
-            <a:pPr algn="l" indent="0" marL="0">
-              <a:buNone/>
-            </a:pPr>
             <a:r>
               <a:rPr lang="en-US" sz="1300" b="1" dirty="0">
                 <a:solidFill>
@@ -9119,9 +9032,6 @@
               </a:rPr>
               <a:t>6 radicals</a:t>
             </a:r>
-            <a:pPr algn="l" indent="0" marL="0">
-              <a:buNone/>
-            </a:pPr>
             <a:r>
               <a:rPr lang="en-US" sz="1300" dirty="0">
                 <a:solidFill>
@@ -9284,9 +9194,6 @@
               </a:rPr>
               <a:t>I can identify the </a:t>
             </a:r>
-            <a:pPr algn="l" indent="0" marL="0">
-              <a:buNone/>
-            </a:pPr>
             <a:r>
               <a:rPr lang="en-US" sz="1300" b="1" dirty="0">
                 <a:solidFill>
@@ -9298,9 +9205,6 @@
               </a:rPr>
               <a:t>meaning clue</a:t>
             </a:r>
-            <a:pPr algn="l" indent="0" marL="0">
-              <a:buNone/>
-            </a:pPr>
             <a:r>
               <a:rPr lang="en-US" sz="1300" dirty="0">
                 <a:solidFill>
@@ -9463,9 +9367,6 @@
               </a:rPr>
               <a:t>I can listen and write </a:t>
             </a:r>
-            <a:pPr algn="l" indent="0" marL="0">
-              <a:buNone/>
-            </a:pPr>
             <a:r>
               <a:rPr lang="en-US" sz="1300" b="1" dirty="0">
                 <a:solidFill>
@@ -9477,9 +9378,6 @@
               </a:rPr>
               <a:t>pinyin</a:t>
             </a:r>
-            <a:pPr algn="l" indent="0" marL="0">
-              <a:buNone/>
-            </a:pPr>
             <a:r>
               <a:rPr lang="en-US" sz="1300" dirty="0">
                 <a:solidFill>
@@ -10221,9 +10119,6 @@
               </a:rPr>
               <a:t>数</a:t>
             </a:r>
-            <a:pPr algn="l" indent="0" marL="0">
-              <a:buNone/>
-            </a:pPr>
             <a:r>
               <a:rPr lang="en-US" sz="1000" dirty="0">
                 <a:solidFill>
@@ -10414,9 +10309,6 @@
               </a:rPr>
               <a:t>欢</a:t>
             </a:r>
-            <a:pPr algn="l" indent="0" marL="0">
-              <a:buNone/>
-            </a:pPr>
             <a:r>
               <a:rPr lang="en-US" sz="1000" dirty="0">
                 <a:solidFill>
@@ -10607,9 +10499,6 @@
               </a:rPr>
               <a:t>喜</a:t>
             </a:r>
-            <a:pPr algn="l" indent="0" marL="0">
-              <a:buNone/>
-            </a:pPr>
             <a:r>
               <a:rPr lang="en-US" sz="1000" dirty="0">
                 <a:solidFill>
@@ -10800,9 +10689,6 @@
               </a:rPr>
               <a:t>问</a:t>
             </a:r>
-            <a:pPr algn="l" indent="0" marL="0">
-              <a:buNone/>
-            </a:pPr>
             <a:r>
               <a:rPr lang="en-US" sz="1000" dirty="0">
                 <a:solidFill>
@@ -10993,9 +10879,6 @@
               </a:rPr>
               <a:t>等</a:t>
             </a:r>
-            <a:pPr algn="l" indent="0" marL="0">
-              <a:buNone/>
-            </a:pPr>
             <a:r>
               <a:rPr lang="en-US" sz="1000" dirty="0">
                 <a:solidFill>
@@ -11216,9 +11099,6 @@
               </a:rPr>
               <a:t>铁</a:t>
             </a:r>
-            <a:pPr algn="l" indent="0" marL="0">
-              <a:buNone/>
-            </a:pPr>
             <a:r>
               <a:rPr lang="en-US" sz="1000" dirty="0">
                 <a:solidFill>
@@ -13695,6 +13575,166 @@
               </a:rPr>
               <a:t>After </a:t>
             </a:r>
+            <a:r>
+              <a:rPr lang="en-US" sz="1400" b="1" dirty="0">
+                <a:solidFill>
+                  <a:srgbClr val="3A7D8C"/>
+                </a:solidFill>
+                <a:latin typeface="Noto Sans SC" pitchFamily="34" charset="0"/>
+                <a:ea typeface="Noto Sans SC" pitchFamily="34" charset="-122"/>
+                <a:cs typeface="Noto Sans SC" pitchFamily="34" charset="-120"/>
+              </a:rPr>
+              <a:t>门</a:t>
+            </a:r>
+            <a:r>
+              <a:rPr lang="en-US" sz="1400" dirty="0">
+                <a:solidFill>
+                  <a:srgbClr val="1E2A38"/>
+                </a:solidFill>
+                <a:latin typeface="Noto Sans SC" pitchFamily="34" charset="0"/>
+                <a:ea typeface="Noto Sans SC" pitchFamily="34" charset="-122"/>
+                <a:cs typeface="Noto Sans SC" pitchFamily="34" charset="-120"/>
+              </a:rPr>
+              <a:t> — what does it mean?</a:t>
+            </a:r>
+            <a:endParaRPr lang="en-US" sz="1400" dirty="0"/>
+          </a:p>
+        </p:txBody>
+      </p:sp>
+      <p:sp>
+        <p:nvSpPr>
+          <p:cNvPr id="12" name="Text 10"/>
+          <p:cNvSpPr/>
+          <p:nvPr/>
+        </p:nvSpPr>
+        <p:spPr>
+          <a:xfrm>
+            <a:off x="1727002" y="2828330"/>
+            <a:ext cx="9586314" cy="161925"/>
+          </a:xfrm>
+          <a:prstGeom prst="rect">
+            <a:avLst/>
+          </a:prstGeom>
+          <a:noFill/>
+          <a:ln/>
+        </p:spPr>
+        <p:txBody>
+          <a:bodyPr wrap="square" lIns="0" tIns="0" rIns="0" bIns="0" rtlCol="0" anchor="t"/>
+          <a:lstStyle/>
+          <a:p>
+            <a:pPr algn="l" indent="0" marL="0">
+              <a:spcBef>
+                <a:spcPts val="300"/>
+              </a:spcBef>
+              <a:buNone/>
+            </a:pPr>
+            <a:r>
+              <a:rPr lang="en-US" sz="950" dirty="0">
+                <a:solidFill>
+                  <a:srgbClr val="8B94A3"/>
+                </a:solidFill>
+                <a:latin typeface="Noto Sans SC" pitchFamily="34" charset="0"/>
+                <a:ea typeface="Noto Sans SC" pitchFamily="34" charset="-122"/>
+                <a:cs typeface="Noto Sans SC" pitchFamily="34" charset="-120"/>
+              </a:rPr>
+              <a:t>Thumbs up if you know</a:t>
+            </a:r>
+            <a:endParaRPr lang="en-US" sz="950" dirty="0"/>
+          </a:p>
+        </p:txBody>
+      </p:sp>
+      <p:sp>
+        <p:nvSpPr>
+          <p:cNvPr id="13" name="Text 11"/>
+          <p:cNvSpPr/>
+          <p:nvPr/>
+        </p:nvSpPr>
+        <p:spPr>
+          <a:xfrm>
+            <a:off x="812750" y="3320355"/>
+            <a:ext cx="10566499" cy="804416"/>
+          </a:xfrm>
+          <a:prstGeom prst="roundRect">
+            <a:avLst>
+              <a:gd name="adj" fmla="val 12630"/>
+            </a:avLst>
+          </a:prstGeom>
+          <a:solidFill>
+            <a:srgbClr val="F6F2E8"/>
+          </a:solidFill>
+          <a:ln/>
+        </p:spPr>
+        <p:txBody>
+          <a:bodyPr wrap="square" rtlCol="0" anchor="ctr"/>
+          <a:lstStyle/>
+          <a:p>
+            <a:pPr indent="0" marL="0">
+              <a:buNone/>
+            </a:pPr>
+            <a:endParaRPr lang="en-US" dirty="0"/>
+          </a:p>
+        </p:txBody>
+      </p:sp>
+      <p:sp>
+        <p:nvSpPr>
+          <p:cNvPr id="14" name="Text 12"/>
+          <p:cNvSpPr/>
+          <p:nvPr/>
+        </p:nvSpPr>
+        <p:spPr>
+          <a:xfrm>
+            <a:off x="1062079" y="3508177"/>
+            <a:ext cx="466344" cy="428625"/>
+          </a:xfrm>
+          <a:prstGeom prst="rect">
+            <a:avLst/>
+          </a:prstGeom>
+          <a:noFill/>
+          <a:ln/>
+        </p:spPr>
+        <p:txBody>
+          <a:bodyPr wrap="square" lIns="0" tIns="0" rIns="0" bIns="0" rtlCol="0" anchor="t"/>
+          <a:lstStyle/>
+          <a:p>
+            <a:pPr algn="ctr" indent="0" marL="0">
+              <a:buNone/>
+            </a:pPr>
+            <a:r>
+              <a:rPr lang="en-US" sz="2400" b="1" dirty="0">
+                <a:solidFill>
+                  <a:srgbClr val="E8CD8A"/>
+                </a:solidFill>
+                <a:latin typeface="Noto Serif SC" pitchFamily="34" charset="0"/>
+                <a:ea typeface="Noto Serif SC" pitchFamily="34" charset="-122"/>
+                <a:cs typeface="Noto Serif SC" pitchFamily="34" charset="-120"/>
+              </a:rPr>
+              <a:t>2</a:t>
+            </a:r>
+            <a:endParaRPr lang="en-US" sz="2400" dirty="0"/>
+          </a:p>
+        </p:txBody>
+      </p:sp>
+      <p:sp>
+        <p:nvSpPr>
+          <p:cNvPr id="15" name="Text 13"/>
+          <p:cNvSpPr/>
+          <p:nvPr/>
+        </p:nvSpPr>
+        <p:spPr>
+          <a:xfrm>
+            <a:off x="1727002" y="3498056"/>
+            <a:ext cx="9586314" cy="248989"/>
+          </a:xfrm>
+          <a:prstGeom prst="rect">
+            <a:avLst/>
+          </a:prstGeom>
+          <a:noFill/>
+          <a:ln/>
+        </p:spPr>
+        <p:txBody>
+          <a:bodyPr wrap="square" lIns="0" tIns="0" rIns="0" bIns="0" rtlCol="0" anchor="t"/>
+          <a:lstStyle/>
+          <a:p>
             <a:pPr algn="l" indent="0" marL="0">
               <a:lnSpc>
                 <a:spcPts val="1960"/>
@@ -13702,6 +13742,17 @@
               <a:buNone/>
             </a:pPr>
             <a:r>
+              <a:rPr lang="en-US" sz="1400" dirty="0">
+                <a:solidFill>
+                  <a:srgbClr val="1E2A38"/>
+                </a:solidFill>
+                <a:latin typeface="Noto Sans SC" pitchFamily="34" charset="0"/>
+                <a:ea typeface="Noto Sans SC" pitchFamily="34" charset="-122"/>
+                <a:cs typeface="Noto Sans SC" pitchFamily="34" charset="-120"/>
+              </a:rPr>
+              <a:t>After </a:t>
+            </a:r>
+            <a:r>
               <a:rPr lang="en-US" sz="1400" b="1" dirty="0">
                 <a:solidFill>
                   <a:srgbClr val="3A7D8C"/>
@@ -13710,203 +13761,8 @@
                 <a:ea typeface="Noto Sans SC" pitchFamily="34" charset="-122"/>
                 <a:cs typeface="Noto Sans SC" pitchFamily="34" charset="-120"/>
               </a:rPr>
-              <a:t>门</a:t>
-            </a:r>
-            <a:pPr algn="l" indent="0" marL="0">
-              <a:lnSpc>
-                <a:spcPts val="1960"/>
-              </a:lnSpc>
-              <a:buNone/>
-            </a:pPr>
-            <a:r>
-              <a:rPr lang="en-US" sz="1400" dirty="0">
-                <a:solidFill>
-                  <a:srgbClr val="1E2A38"/>
-                </a:solidFill>
-                <a:latin typeface="Noto Sans SC" pitchFamily="34" charset="0"/>
-                <a:ea typeface="Noto Sans SC" pitchFamily="34" charset="-122"/>
-                <a:cs typeface="Noto Sans SC" pitchFamily="34" charset="-120"/>
-              </a:rPr>
-              <a:t> — what does it mean?</a:t>
-            </a:r>
-            <a:endParaRPr lang="en-US" sz="1400" dirty="0"/>
-          </a:p>
-        </p:txBody>
-      </p:sp>
-      <p:sp>
-        <p:nvSpPr>
-          <p:cNvPr id="12" name="Text 10"/>
-          <p:cNvSpPr/>
-          <p:nvPr/>
-        </p:nvSpPr>
-        <p:spPr>
-          <a:xfrm>
-            <a:off x="1727002" y="2828330"/>
-            <a:ext cx="9586314" cy="161925"/>
-          </a:xfrm>
-          <a:prstGeom prst="rect">
-            <a:avLst/>
-          </a:prstGeom>
-          <a:noFill/>
-          <a:ln/>
-        </p:spPr>
-        <p:txBody>
-          <a:bodyPr wrap="square" lIns="0" tIns="0" rIns="0" bIns="0" rtlCol="0" anchor="t"/>
-          <a:lstStyle/>
-          <a:p>
-            <a:pPr algn="l" indent="0" marL="0">
-              <a:spcBef>
-                <a:spcPts val="300"/>
-              </a:spcBef>
-              <a:buNone/>
-            </a:pPr>
-            <a:r>
-              <a:rPr lang="en-US" sz="950" dirty="0">
-                <a:solidFill>
-                  <a:srgbClr val="8B94A3"/>
-                </a:solidFill>
-                <a:latin typeface="Noto Sans SC" pitchFamily="34" charset="0"/>
-                <a:ea typeface="Noto Sans SC" pitchFamily="34" charset="-122"/>
-                <a:cs typeface="Noto Sans SC" pitchFamily="34" charset="-120"/>
-              </a:rPr>
-              <a:t>Thumbs up if you know</a:t>
-            </a:r>
-            <a:endParaRPr lang="en-US" sz="950" dirty="0"/>
-          </a:p>
-        </p:txBody>
-      </p:sp>
-      <p:sp>
-        <p:nvSpPr>
-          <p:cNvPr id="13" name="Text 11"/>
-          <p:cNvSpPr/>
-          <p:nvPr/>
-        </p:nvSpPr>
-        <p:spPr>
-          <a:xfrm>
-            <a:off x="812750" y="3320355"/>
-            <a:ext cx="10566499" cy="804416"/>
-          </a:xfrm>
-          <a:prstGeom prst="roundRect">
-            <a:avLst>
-              <a:gd name="adj" fmla="val 12630"/>
-            </a:avLst>
-          </a:prstGeom>
-          <a:solidFill>
-            <a:srgbClr val="F6F2E8"/>
-          </a:solidFill>
-          <a:ln/>
-        </p:spPr>
-        <p:txBody>
-          <a:bodyPr wrap="square" rtlCol="0" anchor="ctr"/>
-          <a:lstStyle/>
-          <a:p>
-            <a:pPr indent="0" marL="0">
-              <a:buNone/>
-            </a:pPr>
-            <a:endParaRPr lang="en-US" dirty="0"/>
-          </a:p>
-        </p:txBody>
-      </p:sp>
-      <p:sp>
-        <p:nvSpPr>
-          <p:cNvPr id="14" name="Text 12"/>
-          <p:cNvSpPr/>
-          <p:nvPr/>
-        </p:nvSpPr>
-        <p:spPr>
-          <a:xfrm>
-            <a:off x="1062079" y="3508177"/>
-            <a:ext cx="466344" cy="428625"/>
-          </a:xfrm>
-          <a:prstGeom prst="rect">
-            <a:avLst/>
-          </a:prstGeom>
-          <a:noFill/>
-          <a:ln/>
-        </p:spPr>
-        <p:txBody>
-          <a:bodyPr wrap="square" lIns="0" tIns="0" rIns="0" bIns="0" rtlCol="0" anchor="t"/>
-          <a:lstStyle/>
-          <a:p>
-            <a:pPr algn="ctr" indent="0" marL="0">
-              <a:buNone/>
-            </a:pPr>
-            <a:r>
-              <a:rPr lang="en-US" sz="2400" b="1" dirty="0">
-                <a:solidFill>
-                  <a:srgbClr val="E8CD8A"/>
-                </a:solidFill>
-                <a:latin typeface="Noto Serif SC" pitchFamily="34" charset="0"/>
-                <a:ea typeface="Noto Serif SC" pitchFamily="34" charset="-122"/>
-                <a:cs typeface="Noto Serif SC" pitchFamily="34" charset="-120"/>
-              </a:rPr>
-              <a:t>2</a:t>
-            </a:r>
-            <a:endParaRPr lang="en-US" sz="2400" dirty="0"/>
-          </a:p>
-        </p:txBody>
-      </p:sp>
-      <p:sp>
-        <p:nvSpPr>
-          <p:cNvPr id="15" name="Text 13"/>
-          <p:cNvSpPr/>
-          <p:nvPr/>
-        </p:nvSpPr>
-        <p:spPr>
-          <a:xfrm>
-            <a:off x="1727002" y="3498056"/>
-            <a:ext cx="9586314" cy="248989"/>
-          </a:xfrm>
-          <a:prstGeom prst="rect">
-            <a:avLst/>
-          </a:prstGeom>
-          <a:noFill/>
-          <a:ln/>
-        </p:spPr>
-        <p:txBody>
-          <a:bodyPr wrap="square" lIns="0" tIns="0" rIns="0" bIns="0" rtlCol="0" anchor="t"/>
-          <a:lstStyle/>
-          <a:p>
-            <a:pPr algn="l" indent="0" marL="0">
-              <a:lnSpc>
-                <a:spcPts val="1960"/>
-              </a:lnSpc>
-              <a:buNone/>
-            </a:pPr>
-            <a:r>
-              <a:rPr lang="en-US" sz="1400" dirty="0">
-                <a:solidFill>
-                  <a:srgbClr val="1E2A38"/>
-                </a:solidFill>
-                <a:latin typeface="Noto Sans SC" pitchFamily="34" charset="0"/>
-                <a:ea typeface="Noto Sans SC" pitchFamily="34" charset="-122"/>
-                <a:cs typeface="Noto Sans SC" pitchFamily="34" charset="-120"/>
-              </a:rPr>
-              <a:t>After </a:t>
-            </a:r>
-            <a:pPr algn="l" indent="0" marL="0">
-              <a:lnSpc>
-                <a:spcPts val="1960"/>
-              </a:lnSpc>
-              <a:buNone/>
-            </a:pPr>
-            <a:r>
-              <a:rPr lang="en-US" sz="1400" b="1" dirty="0">
-                <a:solidFill>
-                  <a:srgbClr val="3A7D8C"/>
-                </a:solidFill>
-                <a:latin typeface="Noto Sans SC" pitchFamily="34" charset="0"/>
-                <a:ea typeface="Noto Sans SC" pitchFamily="34" charset="-122"/>
-                <a:cs typeface="Noto Sans SC" pitchFamily="34" charset="-120"/>
-              </a:rPr>
               <a:t>钅</a:t>
             </a:r>
-            <a:pPr algn="l" indent="0" marL="0">
-              <a:lnSpc>
-                <a:spcPts val="1960"/>
-              </a:lnSpc>
-              <a:buNone/>
-            </a:pPr>
             <a:r>
               <a:rPr lang="en-US" sz="1400" dirty="0">
                 <a:solidFill>
@@ -14709,12 +14565,6 @@
               </a:rPr>
               <a:t>After </a:t>
             </a:r>
-            <a:pPr algn="l" indent="0" marL="0">
-              <a:lnSpc>
-                <a:spcPts val="1960"/>
-              </a:lnSpc>
-              <a:buNone/>
-            </a:pPr>
             <a:r>
               <a:rPr lang="en-US" sz="1400" b="1" dirty="0">
                 <a:solidFill>
@@ -14726,12 +14576,6 @@
               </a:rPr>
               <a:t>门</a:t>
             </a:r>
-            <a:pPr algn="l" indent="0" marL="0">
-              <a:lnSpc>
-                <a:spcPts val="1960"/>
-              </a:lnSpc>
-              <a:buNone/>
-            </a:pPr>
             <a:r>
               <a:rPr lang="en-US" sz="1400" dirty="0">
                 <a:solidFill>
